--- a/course/涌现与非直接协同的奥秘/涌现与非直接协同的奥秘.pptx
+++ b/course/涌现与非直接协同的奥秘/涌现与非直接协同的奥秘.pptx
@@ -692,11 +692,10 @@
           <a:p>
             <a:r>
               <a:rPr lang="en-US" dirty="0"/>
-              <a:t>刚刚我们通过代码和仿真，深刻感受到了在工程调试中，适度的噪声和信息素衰减对于避开“局部最优解”有多么关键。现在，让我们站在更高的维度，为整个课程做一个收尾。来看看从生物机制到人工群体智能，非直接协同（Stigmergy）带给我们的演化启示与未来展望。
-首先是大自然教给我们的『进化捷径』（Shortcut）。在传统的分布式系统设计中，我们总是试图给每个智能体设计最强大的中央大脑、最复杂的通信协议。但社会性昆虫用亿万年的演化事实证明：无需复杂的语言符号系统，甚至无需高级中央神经系统，仅仅依靠“局部吸引 + 媒介痕迹”的极简机制，就能以极低门槛实现高度复杂的社会化协同。这无疑是一条高效的进化捷径。
-其次，是无与伦比的『系统鲁棒性』（Robustness）。正因为去除了笨重的“中心协调器”，这种彻底的去中心化分布式架构在物理世界中展现出了极强的生命力。系统没有单点故障（No Single Point of Failure），任何个体的死伤、迷失、掉线，完全不影响群体任务的持续推进。幸存的个体只需顺着媒介上残留的信息素或建筑痕迹，就能无缝接替工作。这种高容错性，正是我们构建大规模复杂系统时梦寐以求的特质。
-那么在工程上，我们如何释放它的魔力？正如我们在右侧看到的，从无网环境下无人机群（UAV）的局部自组织协同，到成千上万全球开发者无序却高效共建的开源社区（OSS）开发者协同网络，再到多智能体系统（MAS）的路径规划，非直接协同机制已经无处不在。它不仅是生物界的奇迹，更是当代分布式技术演进的方向。
-各位未来的架构师们，今天的课程到这里就全部结束了。但在我们说再见之前，我想给大家留下一道开放性的工程思考题：在你们自己过去或未来的系统设计中，有哪些模块其实可以尝试丢掉“中心协调器”，改用“环境媒介”来巧妙地实现个体的自组织协同？让我们在最后一刻，畅所欲言，聊聊你们脑海中闪现的灵感吧！</a:t>
+              <a:t>同学们，在完成了前面所有的理论学习与动手实践之后，我们这门课也终于迎来了最核心的收官篇章：从生物机制到人工群体智能的真正尾声。
+回顾我们整堂课的旅程，我们首先立足于生物学的基石。从最初探索超个体的未解之谜，到深入剖析 Grassé 提出的 Stigmergy 假说。我们共同见证了白蚁筑拱的定量相变、胡蜂筑巢的定性规则，再到蚂蚁垃圾分类、蜂巢同心圆分布、以及超越昆虫的气味地标和人类踩出的小路。这其中的核心信条只有一个：个体把痕迹写进环境，环境反过来协调个体，从而极为优雅地化解了‘协同悖论’。
+正如著名学者 Theraulaz 曾做出的伟大预言：Stigmergy 的巨大潜力在生物学界仍远未被挖掘，而‘人工科学’会更乐于拥抱它。如今，我们正在兑现这一预言。从经典的蚁群优化算法、群体机器人系统，到多智能体路径规划，乃至我们人类社会的大规模开源协作，Stigmergy 已经拥有了无数工程化的身躯。
+在课程的最后，我想留给未来的系统架构师们一个终极思考。在这个充斥着分布式、去中心化需求的时代，我们习惯了用‘中心协调器’来解决问题，但这往往伴随着单点故障和性能瓶颈。那么，在你们未来设计或正在维护的系统里，有哪些‘中心协调器’，是可以被换成‘环境媒介’的呢？</a:t>
             </a:r>
             <a:endParaRPr lang="en-US" dirty="0"/>
           </a:p>
@@ -3260,7 +3259,7 @@
     <p:bg>
       <p:bgPr>
         <a:solidFill>
-          <a:srgbClr val="F8FAFC"/>
+          <a:srgbClr val="FFFFFF"/>
         </a:solidFill>
       </p:bgPr>
     </p:bg>
@@ -3286,7 +3285,7 @@
         </p:nvSpPr>
         <p:spPr>
           <a:xfrm>
-            <a:off x="548640" y="457200"/>
+            <a:off x="548640" y="548640"/>
             <a:ext cx="8046720" cy="640080"/>
           </a:xfrm>
           <a:prstGeom prst="rect">
@@ -3319,7 +3318,7 @@
                 <a:ea typeface="Microsoft YaHei" pitchFamily="34" charset="-122"/>
                 <a:cs typeface="Microsoft YaHei" pitchFamily="34" charset="-120"/>
               </a:rPr>
-              <a:t>结语：从生物机制到人工群体智能</a:t>
+              <a:t>从生物机制到人工群体智能：真正的尾声</a:t>
             </a:r>
             <a:endParaRPr lang="en-US" sz="1152" dirty="0"/>
           </a:p>
@@ -3327,14 +3326,137 @@
       </p:sp>
       <p:sp>
         <p:nvSpPr>
-          <p:cNvPr id="4" name="Text 1"/>
+          <p:cNvPr id="4" name="Shape 1"/>
           <p:cNvSpPr/>
           <p:nvPr/>
         </p:nvSpPr>
         <p:spPr>
           <a:xfrm>
-            <a:off x="4572000" y="594360"/>
-            <a:ext cx="4023360" cy="420624"/>
+            <a:off x="640080" y="1261872"/>
+            <a:ext cx="7863840" cy="27432"/>
+          </a:xfrm>
+          <a:custGeom>
+            <a:avLst/>
+            <a:gdLst/>
+            <a:ahLst/>
+            <a:cxnLst/>
+            <a:rect l="l" t="t" r="r" b="b"/>
+            <a:pathLst>
+              <a:path w="7863840" h="27432">
+                <a:moveTo>
+                  <a:pt x="0" y="0"/>
+                </a:moveTo>
+                <a:lnTo>
+                  <a:pt x="7863840" y="0"/>
+                </a:lnTo>
+                <a:lnTo>
+                  <a:pt x="7863840" y="27432"/>
+                </a:lnTo>
+                <a:lnTo>
+                  <a:pt x="0" y="27432"/>
+                </a:lnTo>
+                <a:close/>
+              </a:path>
+            </a:pathLst>
+          </a:custGeom>
+          <a:solidFill>
+            <a:srgbClr val="3B82F6"/>
+          </a:solidFill>
+          <a:ln/>
+        </p:spPr>
+      </p:sp>
+      <p:sp>
+        <p:nvSpPr>
+          <p:cNvPr id="5" name="Shape 2"/>
+          <p:cNvSpPr/>
+          <p:nvPr/>
+        </p:nvSpPr>
+        <p:spPr>
+          <a:xfrm>
+            <a:off x="548640" y="1554480"/>
+            <a:ext cx="54864" cy="2194560"/>
+          </a:xfrm>
+          <a:custGeom>
+            <a:avLst/>
+            <a:gdLst/>
+            <a:ahLst/>
+            <a:cxnLst/>
+            <a:rect l="l" t="t" r="r" b="b"/>
+            <a:pathLst>
+              <a:path w="54864" h="2194560">
+                <a:moveTo>
+                  <a:pt x="0" y="0"/>
+                </a:moveTo>
+                <a:lnTo>
+                  <a:pt x="54864" y="0"/>
+                </a:lnTo>
+                <a:lnTo>
+                  <a:pt x="54864" y="2194560"/>
+                </a:lnTo>
+                <a:lnTo>
+                  <a:pt x="0" y="2194560"/>
+                </a:lnTo>
+                <a:close/>
+              </a:path>
+            </a:pathLst>
+          </a:custGeom>
+          <a:solidFill>
+            <a:srgbClr val="3B82F6"/>
+          </a:solidFill>
+          <a:ln/>
+        </p:spPr>
+      </p:sp>
+      <p:sp>
+        <p:nvSpPr>
+          <p:cNvPr id="6" name="Shape 3"/>
+          <p:cNvSpPr/>
+          <p:nvPr/>
+        </p:nvSpPr>
+        <p:spPr>
+          <a:xfrm>
+            <a:off x="603504" y="1554480"/>
+            <a:ext cx="3694176" cy="2194560"/>
+          </a:xfrm>
+          <a:custGeom>
+            <a:avLst/>
+            <a:gdLst/>
+            <a:ahLst/>
+            <a:cxnLst/>
+            <a:rect l="l" t="t" r="r" b="b"/>
+            <a:pathLst>
+              <a:path w="3694176" h="2194560">
+                <a:moveTo>
+                  <a:pt x="0" y="0"/>
+                </a:moveTo>
+                <a:lnTo>
+                  <a:pt x="3694176" y="0"/>
+                </a:lnTo>
+                <a:lnTo>
+                  <a:pt x="3694176" y="2194560"/>
+                </a:lnTo>
+                <a:lnTo>
+                  <a:pt x="0" y="2194560"/>
+                </a:lnTo>
+                <a:close/>
+              </a:path>
+            </a:pathLst>
+          </a:custGeom>
+          <a:solidFill>
+            <a:srgbClr val="EFF6FF"/>
+          </a:solidFill>
+          <a:ln/>
+        </p:spPr>
+      </p:sp>
+      <p:sp>
+        <p:nvSpPr>
+          <p:cNvPr id="7" name="Text 4"/>
+          <p:cNvSpPr/>
+          <p:nvPr/>
+        </p:nvSpPr>
+        <p:spPr>
+          <a:xfrm>
+            <a:off x="786384" y="1865376"/>
+            <a:ext cx="3328416" cy="1572768"/>
           </a:xfrm>
           <a:prstGeom prst="rect">
             <a:avLst/>
@@ -3348,40 +3470,229 @@
           </a:bodyPr>
           <a:lstStyle/>
           <a:p>
-            <a:pPr algn="r" indent="0" marL="0">
-              <a:lnSpc>
-                <a:spcPct val="120000"/>
-              </a:lnSpc>
-              <a:spcBef>
-                <a:spcPts val="360"/>
-              </a:spcBef>
-              <a:buNone/>
-            </a:pPr>
-            <a:r>
-              <a:rPr lang="en-US" sz="1152" dirty="0">
-                <a:solidFill>
-                  <a:srgbClr val="64748B"/>
-                </a:solidFill>
-                <a:latin typeface="Microsoft YaHei" pitchFamily="34" charset="0"/>
-                <a:ea typeface="Microsoft YaHei" pitchFamily="34" charset="-122"/>
-                <a:cs typeface="Microsoft YaHei" pitchFamily="34" charset="-120"/>
-              </a:rPr>
-              <a:t>非直接协同 (Stigmergy) 的演化启示与未来展望</a:t>
+            <a:pPr indent="0" marL="0">
+              <a:lnSpc>
+                <a:spcPct val="120000"/>
+              </a:lnSpc>
+              <a:spcBef>
+                <a:spcPts val="360"/>
+              </a:spcBef>
+              <a:buNone/>
+            </a:pPr>
+            <a:r>
+              <a:rPr lang="en-US" sz="1296" b="1" dirty="0">
+                <a:solidFill>
+                  <a:srgbClr val="1E3A8A"/>
+                </a:solidFill>
+                <a:latin typeface="Microsoft YaHei" pitchFamily="34" charset="0"/>
+                <a:ea typeface="Microsoft YaHei" pitchFamily="34" charset="-122"/>
+                <a:cs typeface="Microsoft YaHei" pitchFamily="34" charset="-120"/>
+              </a:rPr>
+              <a:t>生物学基石：自组织的涌现</a:t>
             </a:r>
             <a:endParaRPr lang="en-US" sz="1152" dirty="0"/>
           </a:p>
+          <a:p>
+            <a:pPr indent="0" marL="0">
+              <a:lnSpc>
+                <a:spcPct val="120000"/>
+              </a:lnSpc>
+              <a:spcBef>
+                <a:spcPts val="360"/>
+              </a:spcBef>
+              <a:buNone/>
+            </a:pPr>
+            <a:r>
+              <a:rPr lang="en-US" sz="1008" dirty="0">
+                <a:solidFill>
+                  <a:srgbClr val="475569"/>
+                </a:solidFill>
+                <a:latin typeface="Microsoft YaHei" pitchFamily="34" charset="0"/>
+                <a:ea typeface="Microsoft YaHei" pitchFamily="34" charset="-122"/>
+                <a:cs typeface="Microsoft YaHei" pitchFamily="34" charset="-120"/>
+              </a:rPr>
+              <a:t>• </a:t>
+            </a:r>
+            <a:pPr indent="0" marL="0">
+              <a:lnSpc>
+                <a:spcPct val="120000"/>
+              </a:lnSpc>
+              <a:spcBef>
+                <a:spcPts val="360"/>
+              </a:spcBef>
+              <a:buNone/>
+            </a:pPr>
+            <a:r>
+              <a:rPr lang="en-US" sz="1008" b="1" dirty="0">
+                <a:solidFill>
+                  <a:srgbClr val="475569"/>
+                </a:solidFill>
+                <a:latin typeface="Microsoft YaHei" pitchFamily="34" charset="0"/>
+                <a:ea typeface="Microsoft YaHei" pitchFamily="34" charset="-122"/>
+                <a:cs typeface="Microsoft YaHei" pitchFamily="34" charset="-120"/>
+              </a:rPr>
+              <a:t>经典回顾：</a:t>
+            </a:r>
+            <a:pPr indent="0" marL="0">
+              <a:lnSpc>
+                <a:spcPct val="120000"/>
+              </a:lnSpc>
+              <a:spcBef>
+                <a:spcPts val="360"/>
+              </a:spcBef>
+              <a:buNone/>
+            </a:pPr>
+            <a:r>
+              <a:rPr lang="en-US" sz="1008" dirty="0">
+                <a:solidFill>
+                  <a:srgbClr val="475569"/>
+                </a:solidFill>
+                <a:latin typeface="Microsoft YaHei" pitchFamily="34" charset="0"/>
+                <a:ea typeface="Microsoft YaHei" pitchFamily="34" charset="-122"/>
+                <a:cs typeface="Microsoft YaHei" pitchFamily="34" charset="-120"/>
+              </a:rPr>
+              <a:t> 从超个体之谜到 Grassé 的 Stigmergy 假说</a:t>
+            </a:r>
+            <a:endParaRPr lang="en-US" sz="1152" dirty="0"/>
+          </a:p>
+          <a:p>
+            <a:pPr indent="0" marL="0">
+              <a:lnSpc>
+                <a:spcPct val="120000"/>
+              </a:lnSpc>
+              <a:spcBef>
+                <a:spcPts val="360"/>
+              </a:spcBef>
+              <a:buNone/>
+            </a:pPr>
+            <a:r>
+              <a:rPr lang="en-US" sz="1008" dirty="0">
+                <a:solidFill>
+                  <a:srgbClr val="475569"/>
+                </a:solidFill>
+                <a:latin typeface="Microsoft YaHei" pitchFamily="34" charset="0"/>
+                <a:ea typeface="Microsoft YaHei" pitchFamily="34" charset="-122"/>
+                <a:cs typeface="Microsoft YaHei" pitchFamily="34" charset="-120"/>
+              </a:rPr>
+              <a:t>• </a:t>
+            </a:r>
+            <a:pPr indent="0" marL="0">
+              <a:lnSpc>
+                <a:spcPct val="120000"/>
+              </a:lnSpc>
+              <a:spcBef>
+                <a:spcPts val="360"/>
+              </a:spcBef>
+              <a:buNone/>
+            </a:pPr>
+            <a:r>
+              <a:rPr lang="en-US" sz="1008" b="1" dirty="0">
+                <a:solidFill>
+                  <a:srgbClr val="475569"/>
+                </a:solidFill>
+                <a:latin typeface="Microsoft YaHei" pitchFamily="34" charset="0"/>
+                <a:ea typeface="Microsoft YaHei" pitchFamily="34" charset="-122"/>
+                <a:cs typeface="Microsoft YaHei" pitchFamily="34" charset="-120"/>
+              </a:rPr>
+              <a:t>机制解密：</a:t>
+            </a:r>
+            <a:pPr indent="0" marL="0">
+              <a:lnSpc>
+                <a:spcPct val="120000"/>
+              </a:lnSpc>
+              <a:spcBef>
+                <a:spcPts val="360"/>
+              </a:spcBef>
+              <a:buNone/>
+            </a:pPr>
+            <a:r>
+              <a:rPr lang="en-US" sz="1008" dirty="0">
+                <a:solidFill>
+                  <a:srgbClr val="475569"/>
+                </a:solidFill>
+                <a:latin typeface="Microsoft YaHei" pitchFamily="34" charset="0"/>
+                <a:ea typeface="Microsoft YaHei" pitchFamily="34" charset="-122"/>
+                <a:cs typeface="Microsoft YaHei" pitchFamily="34" charset="-120"/>
+              </a:rPr>
+              <a:t> 定量与定性模型，揭示无中心控制的自组织分拣</a:t>
+            </a:r>
+            <a:endParaRPr lang="en-US" sz="1152" dirty="0"/>
+          </a:p>
+          <a:p>
+            <a:pPr indent="0" marL="0">
+              <a:lnSpc>
+                <a:spcPct val="120000"/>
+              </a:lnSpc>
+              <a:spcBef>
+                <a:spcPts val="360"/>
+              </a:spcBef>
+              <a:buNone/>
+            </a:pPr>
+            <a:r>
+              <a:rPr lang="en-US" sz="1008" dirty="0">
+                <a:solidFill>
+                  <a:srgbClr val="475569"/>
+                </a:solidFill>
+                <a:latin typeface="Microsoft YaHei" pitchFamily="34" charset="0"/>
+                <a:ea typeface="Microsoft YaHei" pitchFamily="34" charset="-122"/>
+                <a:cs typeface="Microsoft YaHei" pitchFamily="34" charset="-120"/>
+              </a:rPr>
+              <a:t>• </a:t>
+            </a:r>
+            <a:pPr indent="0" marL="0">
+              <a:lnSpc>
+                <a:spcPct val="120000"/>
+              </a:lnSpc>
+              <a:spcBef>
+                <a:spcPts val="360"/>
+              </a:spcBef>
+              <a:buNone/>
+            </a:pPr>
+            <a:r>
+              <a:rPr lang="en-US" sz="1008" b="1" dirty="0">
+                <a:solidFill>
+                  <a:srgbClr val="475569"/>
+                </a:solidFill>
+                <a:latin typeface="Microsoft YaHei" pitchFamily="34" charset="0"/>
+                <a:ea typeface="Microsoft YaHei" pitchFamily="34" charset="-122"/>
+                <a:cs typeface="Microsoft YaHei" pitchFamily="34" charset="-120"/>
+              </a:rPr>
+              <a:t>协同悖论：</a:t>
+            </a:r>
+            <a:pPr indent="0" marL="0">
+              <a:lnSpc>
+                <a:spcPct val="120000"/>
+              </a:lnSpc>
+              <a:spcBef>
+                <a:spcPts val="360"/>
+              </a:spcBef>
+              <a:buNone/>
+            </a:pPr>
+            <a:r>
+              <a:rPr lang="en-US" sz="1008" dirty="0">
+                <a:solidFill>
+                  <a:srgbClr val="475569"/>
+                </a:solidFill>
+                <a:latin typeface="Microsoft YaHei" pitchFamily="34" charset="0"/>
+                <a:ea typeface="Microsoft YaHei" pitchFamily="34" charset="-122"/>
+                <a:cs typeface="Microsoft YaHei" pitchFamily="34" charset="-120"/>
+              </a:rPr>
+              <a:t> 个体将痕迹写入环境，环境反过来引导个体行为</a:t>
+            </a:r>
+            <a:endParaRPr lang="en-US" sz="1152" dirty="0"/>
+          </a:p>
         </p:txBody>
       </p:sp>
       <p:sp>
         <p:nvSpPr>
-          <p:cNvPr id="5" name="Shape 2"/>
+          <p:cNvPr id="8" name="Shape 5"/>
           <p:cNvSpPr/>
           <p:nvPr/>
         </p:nvSpPr>
         <p:spPr>
           <a:xfrm>
-            <a:off x="548640" y="1143000"/>
-            <a:ext cx="1097280" cy="36576"/>
+            <a:off x="4846320" y="1554480"/>
+            <a:ext cx="54864" cy="2194560"/>
           </a:xfrm>
           <a:custGeom>
             <a:avLst/>
@@ -3390,39 +3701,39 @@
             <a:cxnLst/>
             <a:rect l="l" t="t" r="r" b="b"/>
             <a:pathLst>
-              <a:path w="1097280" h="36576">
+              <a:path w="54864" h="2194560">
                 <a:moveTo>
                   <a:pt x="0" y="0"/>
                 </a:moveTo>
                 <a:lnTo>
-                  <a:pt x="1097280" y="0"/>
-                </a:lnTo>
-                <a:lnTo>
-                  <a:pt x="1097280" y="36576"/>
-                </a:lnTo>
-                <a:lnTo>
-                  <a:pt x="0" y="36576"/>
+                  <a:pt x="54864" y="0"/>
+                </a:lnTo>
+                <a:lnTo>
+                  <a:pt x="54864" y="2194560"/>
+                </a:lnTo>
+                <a:lnTo>
+                  <a:pt x="0" y="2194560"/>
                 </a:lnTo>
                 <a:close/>
               </a:path>
             </a:pathLst>
           </a:custGeom>
           <a:solidFill>
-            <a:srgbClr val="3B82F6"/>
+            <a:srgbClr val="0D9488"/>
           </a:solidFill>
           <a:ln/>
         </p:spPr>
       </p:sp>
       <p:sp>
         <p:nvSpPr>
-          <p:cNvPr id="6" name="Shape 3"/>
+          <p:cNvPr id="9" name="Shape 6"/>
           <p:cNvSpPr/>
           <p:nvPr/>
         </p:nvSpPr>
         <p:spPr>
           <a:xfrm>
-            <a:off x="548640" y="1645920"/>
-            <a:ext cx="2377440" cy="1920240"/>
+            <a:off x="4901184" y="1554480"/>
+            <a:ext cx="3694176" cy="2194560"/>
           </a:xfrm>
           <a:custGeom>
             <a:avLst/>
@@ -3431,121 +3742,39 @@
             <a:cxnLst/>
             <a:rect l="l" t="t" r="r" b="b"/>
             <a:pathLst>
-              <a:path w="2377440" h="1920240">
+              <a:path w="3694176" h="2194560">
                 <a:moveTo>
                   <a:pt x="0" y="0"/>
                 </a:moveTo>
                 <a:lnTo>
-                  <a:pt x="2377440" y="0"/>
-                </a:lnTo>
-                <a:lnTo>
-                  <a:pt x="2377440" y="1920240"/>
-                </a:lnTo>
-                <a:lnTo>
-                  <a:pt x="0" y="1920240"/>
+                  <a:pt x="3694176" y="0"/>
+                </a:lnTo>
+                <a:lnTo>
+                  <a:pt x="3694176" y="2194560"/>
+                </a:lnTo>
+                <a:lnTo>
+                  <a:pt x="0" y="2194560"/>
                 </a:lnTo>
                 <a:close/>
               </a:path>
             </a:pathLst>
           </a:custGeom>
           <a:solidFill>
-            <a:srgbClr val="EFF6FF"/>
+            <a:srgbClr val="F0FDFA"/>
           </a:solidFill>
           <a:ln/>
         </p:spPr>
       </p:sp>
       <p:sp>
         <p:nvSpPr>
-          <p:cNvPr id="7" name="Shape 4"/>
+          <p:cNvPr id="10" name="Text 7"/>
           <p:cNvSpPr/>
           <p:nvPr/>
         </p:nvSpPr>
         <p:spPr>
           <a:xfrm>
-            <a:off x="3383280" y="1645920"/>
-            <a:ext cx="2377440" cy="1920240"/>
-          </a:xfrm>
-          <a:custGeom>
-            <a:avLst/>
-            <a:gdLst/>
-            <a:ahLst/>
-            <a:cxnLst/>
-            <a:rect l="l" t="t" r="r" b="b"/>
-            <a:pathLst>
-              <a:path w="2377440" h="1920240">
-                <a:moveTo>
-                  <a:pt x="0" y="0"/>
-                </a:moveTo>
-                <a:lnTo>
-                  <a:pt x="2377440" y="0"/>
-                </a:lnTo>
-                <a:lnTo>
-                  <a:pt x="2377440" y="1920240"/>
-                </a:lnTo>
-                <a:lnTo>
-                  <a:pt x="0" y="1920240"/>
-                </a:lnTo>
-                <a:close/>
-              </a:path>
-            </a:pathLst>
-          </a:custGeom>
-          <a:solidFill>
-            <a:srgbClr val="ECFDF5"/>
-          </a:solidFill>
-          <a:ln/>
-        </p:spPr>
-      </p:sp>
-      <p:sp>
-        <p:nvSpPr>
-          <p:cNvPr id="8" name="Shape 5"/>
-          <p:cNvSpPr/>
-          <p:nvPr/>
-        </p:nvSpPr>
-        <p:spPr>
-          <a:xfrm>
-            <a:off x="6217920" y="1645920"/>
-            <a:ext cx="2377440" cy="1920240"/>
-          </a:xfrm>
-          <a:custGeom>
-            <a:avLst/>
-            <a:gdLst/>
-            <a:ahLst/>
-            <a:cxnLst/>
-            <a:rect l="l" t="t" r="r" b="b"/>
-            <a:pathLst>
-              <a:path w="2377440" h="1920240">
-                <a:moveTo>
-                  <a:pt x="0" y="0"/>
-                </a:moveTo>
-                <a:lnTo>
-                  <a:pt x="2377440" y="0"/>
-                </a:lnTo>
-                <a:lnTo>
-                  <a:pt x="2377440" y="1920240"/>
-                </a:lnTo>
-                <a:lnTo>
-                  <a:pt x="0" y="1920240"/>
-                </a:lnTo>
-                <a:close/>
-              </a:path>
-            </a:pathLst>
-          </a:custGeom>
-          <a:solidFill>
-            <a:srgbClr val="F5F3FF"/>
-          </a:solidFill>
-          <a:ln/>
-        </p:spPr>
-      </p:sp>
-      <p:sp>
-        <p:nvSpPr>
-          <p:cNvPr id="9" name="Text 6"/>
-          <p:cNvSpPr/>
-          <p:nvPr/>
-        </p:nvSpPr>
-        <p:spPr>
-          <a:xfrm>
-            <a:off x="685800" y="1783080"/>
-            <a:ext cx="2103120" cy="448056"/>
+            <a:off x="5084064" y="1865376"/>
+            <a:ext cx="3328416" cy="1572768"/>
           </a:xfrm>
           <a:prstGeom prst="rect">
             <a:avLst/>
@@ -3571,28 +3800,258 @@
             <a:r>
               <a:rPr lang="en-US" sz="1296" b="1" dirty="0">
                 <a:solidFill>
-                  <a:srgbClr val="1E40AF"/>
-                </a:solidFill>
-                <a:latin typeface="Microsoft YaHei" pitchFamily="34" charset="0"/>
-                <a:ea typeface="Microsoft YaHei" pitchFamily="34" charset="-122"/>
-                <a:cs typeface="Microsoft YaHei" pitchFamily="34" charset="-120"/>
-              </a:rPr>
-              <a:t>进化捷径 (Shortcut)</a:t>
+                  <a:srgbClr val="0F766E"/>
+                </a:solidFill>
+                <a:latin typeface="Microsoft YaHei" pitchFamily="34" charset="0"/>
+                <a:ea typeface="Microsoft YaHei" pitchFamily="34" charset="-122"/>
+                <a:cs typeface="Microsoft YaHei" pitchFamily="34" charset="-120"/>
+              </a:rPr>
+              <a:t>人工科学：工程化的身躯</a:t>
             </a:r>
             <a:endParaRPr lang="en-US" sz="1152" dirty="0"/>
           </a:p>
+          <a:p>
+            <a:pPr indent="0" marL="0">
+              <a:lnSpc>
+                <a:spcPct val="120000"/>
+              </a:lnSpc>
+              <a:spcBef>
+                <a:spcPts val="360"/>
+              </a:spcBef>
+              <a:buNone/>
+            </a:pPr>
+            <a:r>
+              <a:rPr lang="en-US" sz="1008" dirty="0">
+                <a:solidFill>
+                  <a:srgbClr val="475569"/>
+                </a:solidFill>
+                <a:latin typeface="Microsoft YaHei" pitchFamily="34" charset="0"/>
+                <a:ea typeface="Microsoft YaHei" pitchFamily="34" charset="-122"/>
+                <a:cs typeface="Microsoft YaHei" pitchFamily="34" charset="-120"/>
+              </a:rPr>
+              <a:t>• </a:t>
+            </a:r>
+            <a:pPr indent="0" marL="0">
+              <a:lnSpc>
+                <a:spcPct val="120000"/>
+              </a:lnSpc>
+              <a:spcBef>
+                <a:spcPts val="360"/>
+              </a:spcBef>
+              <a:buNone/>
+            </a:pPr>
+            <a:r>
+              <a:rPr lang="en-US" sz="1008" b="1" dirty="0">
+                <a:solidFill>
+                  <a:srgbClr val="475569"/>
+                </a:solidFill>
+                <a:latin typeface="Microsoft YaHei" pitchFamily="34" charset="0"/>
+                <a:ea typeface="Microsoft YaHei" pitchFamily="34" charset="-122"/>
+                <a:cs typeface="Microsoft YaHei" pitchFamily="34" charset="-120"/>
+              </a:rPr>
+              <a:t>Theraulaz 预言：</a:t>
+            </a:r>
+            <a:pPr indent="0" marL="0">
+              <a:lnSpc>
+                <a:spcPct val="120000"/>
+              </a:lnSpc>
+              <a:spcBef>
+                <a:spcPts val="360"/>
+              </a:spcBef>
+              <a:buNone/>
+            </a:pPr>
+            <a:r>
+              <a:rPr lang="en-US" sz="1008" dirty="0">
+                <a:solidFill>
+                  <a:srgbClr val="475569"/>
+                </a:solidFill>
+                <a:latin typeface="Microsoft YaHei" pitchFamily="34" charset="0"/>
+                <a:ea typeface="Microsoft YaHei" pitchFamily="34" charset="-122"/>
+                <a:cs typeface="Microsoft YaHei" pitchFamily="34" charset="-120"/>
+              </a:rPr>
+              <a:t> Stigmergy 的巨大潜力将在人工科学中释放</a:t>
+            </a:r>
+            <a:endParaRPr lang="en-US" sz="1152" dirty="0"/>
+          </a:p>
+          <a:p>
+            <a:pPr indent="0" marL="0">
+              <a:lnSpc>
+                <a:spcPct val="120000"/>
+              </a:lnSpc>
+              <a:spcBef>
+                <a:spcPts val="360"/>
+              </a:spcBef>
+              <a:buNone/>
+            </a:pPr>
+            <a:r>
+              <a:rPr lang="en-US" sz="1008" dirty="0">
+                <a:solidFill>
+                  <a:srgbClr val="475569"/>
+                </a:solidFill>
+                <a:latin typeface="Microsoft YaHei" pitchFamily="34" charset="0"/>
+                <a:ea typeface="Microsoft YaHei" pitchFamily="34" charset="-122"/>
+                <a:cs typeface="Microsoft YaHei" pitchFamily="34" charset="-120"/>
+              </a:rPr>
+              <a:t>• </a:t>
+            </a:r>
+            <a:pPr indent="0" marL="0">
+              <a:lnSpc>
+                <a:spcPct val="120000"/>
+              </a:lnSpc>
+              <a:spcBef>
+                <a:spcPts val="360"/>
+              </a:spcBef>
+              <a:buNone/>
+            </a:pPr>
+            <a:r>
+              <a:rPr lang="en-US" sz="1008" b="1" dirty="0">
+                <a:solidFill>
+                  <a:srgbClr val="475569"/>
+                </a:solidFill>
+                <a:latin typeface="Microsoft YaHei" pitchFamily="34" charset="0"/>
+                <a:ea typeface="Microsoft YaHei" pitchFamily="34" charset="-122"/>
+                <a:cs typeface="Microsoft YaHei" pitchFamily="34" charset="-120"/>
+              </a:rPr>
+              <a:t>工程实践：</a:t>
+            </a:r>
+            <a:pPr indent="0" marL="0">
+              <a:lnSpc>
+                <a:spcPct val="120000"/>
+              </a:lnSpc>
+              <a:spcBef>
+                <a:spcPts val="360"/>
+              </a:spcBef>
+              <a:buNone/>
+            </a:pPr>
+            <a:r>
+              <a:rPr lang="en-US" sz="1008" dirty="0">
+                <a:solidFill>
+                  <a:srgbClr val="475569"/>
+                </a:solidFill>
+                <a:latin typeface="Microsoft YaHei" pitchFamily="34" charset="0"/>
+                <a:ea typeface="Microsoft YaHei" pitchFamily="34" charset="-122"/>
+                <a:cs typeface="Microsoft YaHei" pitchFamily="34" charset="-120"/>
+              </a:rPr>
+              <a:t> 蚁群算法(ACO)、群体机器人、开源异步协作</a:t>
+            </a:r>
+            <a:endParaRPr lang="en-US" sz="1152" dirty="0"/>
+          </a:p>
+          <a:p>
+            <a:pPr indent="0" marL="0">
+              <a:lnSpc>
+                <a:spcPct val="120000"/>
+              </a:lnSpc>
+              <a:spcBef>
+                <a:spcPts val="360"/>
+              </a:spcBef>
+              <a:buNone/>
+            </a:pPr>
+            <a:r>
+              <a:rPr lang="en-US" sz="1008" dirty="0">
+                <a:solidFill>
+                  <a:srgbClr val="475569"/>
+                </a:solidFill>
+                <a:latin typeface="Microsoft YaHei" pitchFamily="34" charset="0"/>
+                <a:ea typeface="Microsoft YaHei" pitchFamily="34" charset="-122"/>
+                <a:cs typeface="Microsoft YaHei" pitchFamily="34" charset="-120"/>
+              </a:rPr>
+              <a:t>• </a:t>
+            </a:r>
+            <a:pPr indent="0" marL="0">
+              <a:lnSpc>
+                <a:spcPct val="120000"/>
+              </a:lnSpc>
+              <a:spcBef>
+                <a:spcPts val="360"/>
+              </a:spcBef>
+              <a:buNone/>
+            </a:pPr>
+            <a:r>
+              <a:rPr lang="en-US" sz="1008" b="1" dirty="0">
+                <a:solidFill>
+                  <a:srgbClr val="475569"/>
+                </a:solidFill>
+                <a:latin typeface="Microsoft YaHei" pitchFamily="34" charset="0"/>
+                <a:ea typeface="Microsoft YaHei" pitchFamily="34" charset="-122"/>
+                <a:cs typeface="Microsoft YaHei" pitchFamily="34" charset="-120"/>
+              </a:rPr>
+              <a:t>设计变革：</a:t>
+            </a:r>
+            <a:pPr indent="0" marL="0">
+              <a:lnSpc>
+                <a:spcPct val="120000"/>
+              </a:lnSpc>
+              <a:spcBef>
+                <a:spcPts val="360"/>
+              </a:spcBef>
+              <a:buNone/>
+            </a:pPr>
+            <a:r>
+              <a:rPr lang="en-US" sz="1008" dirty="0">
+                <a:solidFill>
+                  <a:srgbClr val="475569"/>
+                </a:solidFill>
+                <a:latin typeface="Microsoft YaHei" pitchFamily="34" charset="0"/>
+                <a:ea typeface="Microsoft YaHei" pitchFamily="34" charset="-122"/>
+                <a:cs typeface="Microsoft YaHei" pitchFamily="34" charset="-120"/>
+              </a:rPr>
+              <a:t> 用“环境媒介”解耦复杂系统中的重度中心协调器</a:t>
+            </a:r>
+            <a:endParaRPr lang="en-US" sz="1152" dirty="0"/>
+          </a:p>
         </p:txBody>
       </p:sp>
       <p:sp>
         <p:nvSpPr>
-          <p:cNvPr id="10" name="Text 7"/>
+          <p:cNvPr id="11" name="Shape 8"/>
           <p:cNvSpPr/>
           <p:nvPr/>
         </p:nvSpPr>
         <p:spPr>
           <a:xfrm>
-            <a:off x="3520440" y="1783080"/>
-            <a:ext cx="2103120" cy="448056"/>
+            <a:off x="548640" y="3977640"/>
+            <a:ext cx="8046720" cy="457200"/>
+          </a:xfrm>
+          <a:custGeom>
+            <a:avLst/>
+            <a:gdLst/>
+            <a:ahLst/>
+            <a:cxnLst/>
+            <a:rect l="l" t="t" r="r" b="b"/>
+            <a:pathLst>
+              <a:path w="8046720" h="457200">
+                <a:moveTo>
+                  <a:pt x="0" y="0"/>
+                </a:moveTo>
+                <a:lnTo>
+                  <a:pt x="8046720" y="0"/>
+                </a:lnTo>
+                <a:lnTo>
+                  <a:pt x="8046720" y="457200"/>
+                </a:lnTo>
+                <a:lnTo>
+                  <a:pt x="0" y="457200"/>
+                </a:lnTo>
+                <a:close/>
+              </a:path>
+            </a:pathLst>
+          </a:custGeom>
+          <a:solidFill>
+            <a:srgbClr val="F8FAFC"/>
+          </a:solidFill>
+          <a:ln/>
+        </p:spPr>
+      </p:sp>
+      <p:sp>
+        <p:nvSpPr>
+          <p:cNvPr id="12" name="Text 9"/>
+          <p:cNvSpPr/>
+          <p:nvPr/>
+        </p:nvSpPr>
+        <p:spPr>
+          <a:xfrm>
+            <a:off x="731520" y="3995928"/>
+            <a:ext cx="7680960" cy="420624"/>
           </a:xfrm>
           <a:prstGeom prst="rect">
             <a:avLst/>
@@ -3606,572 +4065,27 @@
           </a:bodyPr>
           <a:lstStyle/>
           <a:p>
-            <a:pPr indent="0" marL="0">
-              <a:lnSpc>
-                <a:spcPct val="120000"/>
-              </a:lnSpc>
-              <a:spcBef>
-                <a:spcPts val="360"/>
-              </a:spcBef>
-              <a:buNone/>
-            </a:pPr>
-            <a:r>
-              <a:rPr lang="en-US" sz="1296" b="1" dirty="0">
-                <a:solidFill>
-                  <a:srgbClr val="065F46"/>
-                </a:solidFill>
-                <a:latin typeface="Microsoft YaHei" pitchFamily="34" charset="0"/>
-                <a:ea typeface="Microsoft YaHei" pitchFamily="34" charset="-122"/>
-                <a:cs typeface="Microsoft YaHei" pitchFamily="34" charset="-120"/>
-              </a:rPr>
-              <a:t>系统鲁棒性 (Robustness)</a:t>
-            </a:r>
-            <a:endParaRPr lang="en-US" sz="1152" dirty="0"/>
-          </a:p>
-        </p:txBody>
-      </p:sp>
-      <p:sp>
-        <p:nvSpPr>
-          <p:cNvPr id="11" name="Text 8"/>
-          <p:cNvSpPr/>
-          <p:nvPr/>
-        </p:nvSpPr>
-        <p:spPr>
-          <a:xfrm>
-            <a:off x="6355080" y="1783080"/>
-            <a:ext cx="2103120" cy="448056"/>
-          </a:xfrm>
-          <a:prstGeom prst="rect">
-            <a:avLst/>
-          </a:prstGeom>
-          <a:noFill/>
-          <a:ln/>
-        </p:spPr>
-        <p:txBody>
-          <a:bodyPr wrap="square" lIns="91440" tIns="91440" rIns="91440" bIns="91440" rtlCol="0" anchor="t">
-            <a:spAutoFit/>
-          </a:bodyPr>
-          <a:lstStyle/>
-          <a:p>
-            <a:pPr indent="0" marL="0">
-              <a:lnSpc>
-                <a:spcPct val="120000"/>
-              </a:lnSpc>
-              <a:spcBef>
-                <a:spcPts val="360"/>
-              </a:spcBef>
-              <a:buNone/>
-            </a:pPr>
-            <a:r>
-              <a:rPr lang="en-US" sz="1296" b="1" dirty="0">
-                <a:solidFill>
-                  <a:srgbClr val="5B21B6"/>
-                </a:solidFill>
-                <a:latin typeface="Microsoft YaHei" pitchFamily="34" charset="0"/>
-                <a:ea typeface="Microsoft YaHei" pitchFamily="34" charset="-122"/>
-                <a:cs typeface="Microsoft YaHei" pitchFamily="34" charset="-120"/>
-              </a:rPr>
-              <a:t>工程启示 (Applications)</a:t>
-            </a:r>
-            <a:endParaRPr lang="en-US" sz="1152" dirty="0"/>
-          </a:p>
-        </p:txBody>
-      </p:sp>
-      <p:sp>
-        <p:nvSpPr>
-          <p:cNvPr id="12" name="Shape 9"/>
-          <p:cNvSpPr/>
-          <p:nvPr/>
-        </p:nvSpPr>
-        <p:spPr>
-          <a:xfrm>
-            <a:off x="685800" y="2276856"/>
-            <a:ext cx="2103120" cy="9144"/>
-          </a:xfrm>
-          <a:custGeom>
-            <a:avLst/>
-            <a:gdLst/>
-            <a:ahLst/>
-            <a:cxnLst/>
-            <a:rect l="l" t="t" r="r" b="b"/>
-            <a:pathLst>
-              <a:path w="2103120" h="9144">
-                <a:moveTo>
-                  <a:pt x="0" y="0"/>
-                </a:moveTo>
-                <a:lnTo>
-                  <a:pt x="2103120" y="0"/>
-                </a:lnTo>
-                <a:lnTo>
-                  <a:pt x="2103120" y="9144"/>
-                </a:lnTo>
-                <a:lnTo>
-                  <a:pt x="0" y="9144"/>
-                </a:lnTo>
-                <a:close/>
-              </a:path>
-            </a:pathLst>
-          </a:custGeom>
-          <a:solidFill>
-            <a:srgbClr val="BFDBFE"/>
-          </a:solidFill>
-          <a:ln/>
-        </p:spPr>
-      </p:sp>
-      <p:sp>
-        <p:nvSpPr>
-          <p:cNvPr id="13" name="Shape 10"/>
-          <p:cNvSpPr/>
-          <p:nvPr/>
-        </p:nvSpPr>
-        <p:spPr>
-          <a:xfrm>
-            <a:off x="3520440" y="2276856"/>
-            <a:ext cx="2103120" cy="9144"/>
-          </a:xfrm>
-          <a:custGeom>
-            <a:avLst/>
-            <a:gdLst/>
-            <a:ahLst/>
-            <a:cxnLst/>
-            <a:rect l="l" t="t" r="r" b="b"/>
-            <a:pathLst>
-              <a:path w="2103120" h="9144">
-                <a:moveTo>
-                  <a:pt x="0" y="0"/>
-                </a:moveTo>
-                <a:lnTo>
-                  <a:pt x="2103120" y="0"/>
-                </a:lnTo>
-                <a:lnTo>
-                  <a:pt x="2103120" y="9144"/>
-                </a:lnTo>
-                <a:lnTo>
-                  <a:pt x="0" y="9144"/>
-                </a:lnTo>
-                <a:close/>
-              </a:path>
-            </a:pathLst>
-          </a:custGeom>
-          <a:solidFill>
-            <a:srgbClr val="A7F3D0"/>
-          </a:solidFill>
-          <a:ln/>
-        </p:spPr>
-      </p:sp>
-      <p:sp>
-        <p:nvSpPr>
-          <p:cNvPr id="14" name="Shape 11"/>
-          <p:cNvSpPr/>
-          <p:nvPr/>
-        </p:nvSpPr>
-        <p:spPr>
-          <a:xfrm>
-            <a:off x="6355080" y="2276856"/>
-            <a:ext cx="2103120" cy="9144"/>
-          </a:xfrm>
-          <a:custGeom>
-            <a:avLst/>
-            <a:gdLst/>
-            <a:ahLst/>
-            <a:cxnLst/>
-            <a:rect l="l" t="t" r="r" b="b"/>
-            <a:pathLst>
-              <a:path w="2103120" h="9144">
-                <a:moveTo>
-                  <a:pt x="0" y="0"/>
-                </a:moveTo>
-                <a:lnTo>
-                  <a:pt x="2103120" y="0"/>
-                </a:lnTo>
-                <a:lnTo>
-                  <a:pt x="2103120" y="9144"/>
-                </a:lnTo>
-                <a:lnTo>
-                  <a:pt x="0" y="9144"/>
-                </a:lnTo>
-                <a:close/>
-              </a:path>
-            </a:pathLst>
-          </a:custGeom>
-          <a:solidFill>
-            <a:srgbClr val="DDD6FE"/>
-          </a:solidFill>
-          <a:ln/>
-        </p:spPr>
-      </p:sp>
-      <p:sp>
-        <p:nvSpPr>
-          <p:cNvPr id="15" name="Text 12"/>
-          <p:cNvSpPr/>
-          <p:nvPr/>
-        </p:nvSpPr>
-        <p:spPr>
-          <a:xfrm>
-            <a:off x="685800" y="2331720"/>
-            <a:ext cx="2103120" cy="969264"/>
-          </a:xfrm>
-          <a:prstGeom prst="rect">
-            <a:avLst/>
-          </a:prstGeom>
-          <a:noFill/>
-          <a:ln/>
-        </p:spPr>
-        <p:txBody>
-          <a:bodyPr wrap="square" lIns="91440" tIns="91440" rIns="91440" bIns="91440" rtlCol="0" anchor="t">
-            <a:spAutoFit/>
-          </a:bodyPr>
-          <a:lstStyle/>
-          <a:p>
-            <a:pPr indent="0" marL="0">
-              <a:lnSpc>
-                <a:spcPct val="120000"/>
-              </a:lnSpc>
-              <a:spcBef>
-                <a:spcPts val="360"/>
-              </a:spcBef>
-              <a:buNone/>
-            </a:pPr>
-            <a:r>
-              <a:rPr lang="en-US" sz="1008" dirty="0">
-                <a:solidFill>
-                  <a:srgbClr val="334155"/>
-                </a:solidFill>
-                <a:latin typeface="Microsoft YaHei" pitchFamily="34" charset="0"/>
-                <a:ea typeface="Microsoft YaHei" pitchFamily="34" charset="-122"/>
-                <a:cs typeface="Microsoft YaHei" pitchFamily="34" charset="-120"/>
-              </a:rPr>
-              <a:t>• 无需复杂的语言符号系统</a:t>
-            </a:r>
-            <a:endParaRPr lang="en-US" sz="1152" dirty="0"/>
-          </a:p>
-          <a:p>
-            <a:pPr indent="0" marL="0">
-              <a:lnSpc>
-                <a:spcPct val="120000"/>
-              </a:lnSpc>
-              <a:spcBef>
-                <a:spcPts val="360"/>
-              </a:spcBef>
-              <a:buNone/>
-            </a:pPr>
-            <a:r>
-              <a:rPr lang="en-US" sz="1008" dirty="0">
-                <a:solidFill>
-                  <a:srgbClr val="334155"/>
-                </a:solidFill>
-                <a:latin typeface="Microsoft YaHei" pitchFamily="34" charset="0"/>
-                <a:ea typeface="Microsoft YaHei" pitchFamily="34" charset="-122"/>
-                <a:cs typeface="Microsoft YaHei" pitchFamily="34" charset="-120"/>
-              </a:rPr>
-              <a:t>• 无需高级中央神经系统</a:t>
-            </a:r>
-            <a:endParaRPr lang="en-US" sz="1152" dirty="0"/>
-          </a:p>
-          <a:p>
-            <a:pPr indent="0" marL="0">
-              <a:lnSpc>
-                <a:spcPct val="120000"/>
-              </a:lnSpc>
-              <a:spcBef>
-                <a:spcPts val="360"/>
-              </a:spcBef>
-              <a:buNone/>
-            </a:pPr>
-            <a:r>
-              <a:rPr lang="en-US" sz="1008" dirty="0">
-                <a:solidFill>
-                  <a:srgbClr val="334155"/>
-                </a:solidFill>
-                <a:latin typeface="Microsoft YaHei" pitchFamily="34" charset="0"/>
-                <a:ea typeface="Microsoft YaHei" pitchFamily="34" charset="-122"/>
-                <a:cs typeface="Microsoft YaHei" pitchFamily="34" charset="-120"/>
-              </a:rPr>
-              <a:t>• “局部吸引+媒介痕迹”机制</a:t>
-            </a:r>
-            <a:endParaRPr lang="en-US" sz="1152" dirty="0"/>
-          </a:p>
-          <a:p>
-            <a:pPr indent="0" marL="0">
-              <a:lnSpc>
-                <a:spcPct val="120000"/>
-              </a:lnSpc>
-              <a:spcBef>
-                <a:spcPts val="360"/>
-              </a:spcBef>
-              <a:buNone/>
-            </a:pPr>
-            <a:r>
-              <a:rPr lang="en-US" sz="1008" dirty="0">
-                <a:solidFill>
-                  <a:srgbClr val="334155"/>
-                </a:solidFill>
-                <a:latin typeface="Microsoft YaHei" pitchFamily="34" charset="0"/>
-                <a:ea typeface="Microsoft YaHei" pitchFamily="34" charset="-122"/>
-                <a:cs typeface="Microsoft YaHei" pitchFamily="34" charset="-120"/>
-              </a:rPr>
-              <a:t>• 极低门槛实现高度社会化协同</a:t>
-            </a:r>
-            <a:endParaRPr lang="en-US" sz="1152" dirty="0"/>
-          </a:p>
-        </p:txBody>
-      </p:sp>
-      <p:sp>
-        <p:nvSpPr>
-          <p:cNvPr id="16" name="Text 13"/>
-          <p:cNvSpPr/>
-          <p:nvPr/>
-        </p:nvSpPr>
-        <p:spPr>
-          <a:xfrm>
-            <a:off x="3520440" y="2331720"/>
-            <a:ext cx="2103120" cy="969264"/>
-          </a:xfrm>
-          <a:prstGeom prst="rect">
-            <a:avLst/>
-          </a:prstGeom>
-          <a:noFill/>
-          <a:ln/>
-        </p:spPr>
-        <p:txBody>
-          <a:bodyPr wrap="square" lIns="91440" tIns="91440" rIns="91440" bIns="91440" rtlCol="0" anchor="t">
-            <a:spAutoFit/>
-          </a:bodyPr>
-          <a:lstStyle/>
-          <a:p>
-            <a:pPr indent="0" marL="0">
-              <a:lnSpc>
-                <a:spcPct val="120000"/>
-              </a:lnSpc>
-              <a:spcBef>
-                <a:spcPts val="360"/>
-              </a:spcBef>
-              <a:buNone/>
-            </a:pPr>
-            <a:r>
-              <a:rPr lang="en-US" sz="1008" dirty="0">
-                <a:solidFill>
-                  <a:srgbClr val="334155"/>
-                </a:solidFill>
-                <a:latin typeface="Microsoft YaHei" pitchFamily="34" charset="0"/>
-                <a:ea typeface="Microsoft YaHei" pitchFamily="34" charset="-122"/>
-                <a:cs typeface="Microsoft YaHei" pitchFamily="34" charset="-120"/>
-              </a:rPr>
-              <a:t>• 彻底的去中心化分布式架构</a:t>
-            </a:r>
-            <a:endParaRPr lang="en-US" sz="1152" dirty="0"/>
-          </a:p>
-          <a:p>
-            <a:pPr indent="0" marL="0">
-              <a:lnSpc>
-                <a:spcPct val="120000"/>
-              </a:lnSpc>
-              <a:spcBef>
-                <a:spcPts val="360"/>
-              </a:spcBef>
-              <a:buNone/>
-            </a:pPr>
-            <a:r>
-              <a:rPr lang="en-US" sz="1008" dirty="0">
-                <a:solidFill>
-                  <a:srgbClr val="334155"/>
-                </a:solidFill>
-                <a:latin typeface="Microsoft YaHei" pitchFamily="34" charset="0"/>
-                <a:ea typeface="Microsoft YaHei" pitchFamily="34" charset="-122"/>
-                <a:cs typeface="Microsoft YaHei" pitchFamily="34" charset="-120"/>
-              </a:rPr>
-              <a:t>• 无单点故障 (No Single Point)</a:t>
-            </a:r>
-            <a:endParaRPr lang="en-US" sz="1152" dirty="0"/>
-          </a:p>
-          <a:p>
-            <a:pPr indent="0" marL="0">
-              <a:lnSpc>
-                <a:spcPct val="120000"/>
-              </a:lnSpc>
-              <a:spcBef>
-                <a:spcPts val="360"/>
-              </a:spcBef>
-              <a:buNone/>
-            </a:pPr>
-            <a:r>
-              <a:rPr lang="en-US" sz="1008" dirty="0">
-                <a:solidFill>
-                  <a:srgbClr val="334155"/>
-                </a:solidFill>
-                <a:latin typeface="Microsoft YaHei" pitchFamily="34" charset="0"/>
-                <a:ea typeface="Microsoft YaHei" pitchFamily="34" charset="-122"/>
-                <a:cs typeface="Microsoft YaHei" pitchFamily="34" charset="-120"/>
-              </a:rPr>
-              <a:t>• 个体死伤不影响整体任务</a:t>
-            </a:r>
-            <a:endParaRPr lang="en-US" sz="1152" dirty="0"/>
-          </a:p>
-          <a:p>
-            <a:pPr indent="0" marL="0">
-              <a:lnSpc>
-                <a:spcPct val="120000"/>
-              </a:lnSpc>
-              <a:spcBef>
-                <a:spcPts val="360"/>
-              </a:spcBef>
-              <a:buNone/>
-            </a:pPr>
-            <a:r>
-              <a:rPr lang="en-US" sz="1008" dirty="0">
-                <a:solidFill>
-                  <a:srgbClr val="334155"/>
-                </a:solidFill>
-                <a:latin typeface="Microsoft YaHei" pitchFamily="34" charset="0"/>
-                <a:ea typeface="Microsoft YaHei" pitchFamily="34" charset="-122"/>
-                <a:cs typeface="Microsoft YaHei" pitchFamily="34" charset="-120"/>
-              </a:rPr>
-              <a:t>• 天然具备极高的系统抗毁性</a:t>
-            </a:r>
-            <a:endParaRPr lang="en-US" sz="1152" dirty="0"/>
-          </a:p>
-        </p:txBody>
-      </p:sp>
-      <p:sp>
-        <p:nvSpPr>
-          <p:cNvPr id="17" name="Text 14"/>
-          <p:cNvSpPr/>
-          <p:nvPr/>
-        </p:nvSpPr>
-        <p:spPr>
-          <a:xfrm>
-            <a:off x="6355080" y="2331720"/>
-            <a:ext cx="2103120" cy="969264"/>
-          </a:xfrm>
-          <a:prstGeom prst="rect">
-            <a:avLst/>
-          </a:prstGeom>
-          <a:noFill/>
-          <a:ln/>
-        </p:spPr>
-        <p:txBody>
-          <a:bodyPr wrap="square" lIns="91440" tIns="91440" rIns="91440" bIns="91440" rtlCol="0" anchor="t">
-            <a:spAutoFit/>
-          </a:bodyPr>
-          <a:lstStyle/>
-          <a:p>
-            <a:pPr indent="0" marL="0">
-              <a:lnSpc>
-                <a:spcPct val="120000"/>
-              </a:lnSpc>
-              <a:spcBef>
-                <a:spcPts val="360"/>
-              </a:spcBef>
-              <a:buNone/>
-            </a:pPr>
-            <a:r>
-              <a:rPr lang="en-US" sz="1008" dirty="0">
-                <a:solidFill>
-                  <a:srgbClr val="334155"/>
-                </a:solidFill>
-                <a:latin typeface="Microsoft YaHei" pitchFamily="34" charset="0"/>
-                <a:ea typeface="Microsoft YaHei" pitchFamily="34" charset="-122"/>
-                <a:cs typeface="Microsoft YaHei" pitchFamily="34" charset="-120"/>
-              </a:rPr>
-              <a:t>• 无人机群 (UAV) 局部无网协同</a:t>
-            </a:r>
-            <a:endParaRPr lang="en-US" sz="1152" dirty="0"/>
-          </a:p>
-          <a:p>
-            <a:pPr indent="0" marL="0">
-              <a:lnSpc>
-                <a:spcPct val="120000"/>
-              </a:lnSpc>
-              <a:spcBef>
-                <a:spcPts val="360"/>
-              </a:spcBef>
-              <a:buNone/>
-            </a:pPr>
-            <a:r>
-              <a:rPr lang="en-US" sz="1008" dirty="0">
-                <a:solidFill>
-                  <a:srgbClr val="334155"/>
-                </a:solidFill>
-                <a:latin typeface="Microsoft YaHei" pitchFamily="34" charset="0"/>
-                <a:ea typeface="Microsoft YaHei" pitchFamily="34" charset="-122"/>
-                <a:cs typeface="Microsoft YaHei" pitchFamily="34" charset="-120"/>
-              </a:rPr>
-              <a:t>• 开源社区 (OSS) 开发者协同</a:t>
-            </a:r>
-            <a:endParaRPr lang="en-US" sz="1152" dirty="0"/>
-          </a:p>
-          <a:p>
-            <a:pPr indent="0" marL="0">
-              <a:lnSpc>
-                <a:spcPct val="120000"/>
-              </a:lnSpc>
-              <a:spcBef>
-                <a:spcPts val="360"/>
-              </a:spcBef>
-              <a:buNone/>
-            </a:pPr>
-            <a:r>
-              <a:rPr lang="en-US" sz="1008" dirty="0">
-                <a:solidFill>
-                  <a:srgbClr val="334155"/>
-                </a:solidFill>
-                <a:latin typeface="Microsoft YaHei" pitchFamily="34" charset="0"/>
-                <a:ea typeface="Microsoft YaHei" pitchFamily="34" charset="-122"/>
-                <a:cs typeface="Microsoft YaHei" pitchFamily="34" charset="-120"/>
-              </a:rPr>
-              <a:t>• 多智能体系统 (MAS) 自组织</a:t>
-            </a:r>
-            <a:endParaRPr lang="en-US" sz="1152" dirty="0"/>
-          </a:p>
-          <a:p>
-            <a:pPr indent="0" marL="0">
-              <a:lnSpc>
-                <a:spcPct val="120000"/>
-              </a:lnSpc>
-              <a:spcBef>
-                <a:spcPts val="360"/>
-              </a:spcBef>
-              <a:buNone/>
-            </a:pPr>
-            <a:r>
-              <a:rPr lang="en-US" sz="1008" dirty="0">
-                <a:solidFill>
-                  <a:srgbClr val="334155"/>
-                </a:solidFill>
-                <a:latin typeface="Microsoft YaHei" pitchFamily="34" charset="0"/>
-                <a:ea typeface="Microsoft YaHei" pitchFamily="34" charset="-122"/>
-                <a:cs typeface="Microsoft YaHei" pitchFamily="34" charset="-120"/>
-              </a:rPr>
-              <a:t>• 复杂物流网络的动态自适应调度</a:t>
-            </a:r>
-            <a:endParaRPr lang="en-US" sz="1152" dirty="0"/>
-          </a:p>
-        </p:txBody>
-      </p:sp>
-      <p:sp>
-        <p:nvSpPr>
-          <p:cNvPr id="18" name="Text 15"/>
-          <p:cNvSpPr/>
-          <p:nvPr/>
-        </p:nvSpPr>
-        <p:spPr>
-          <a:xfrm>
-            <a:off x="548640" y="3977640"/>
-            <a:ext cx="8046720" cy="420624"/>
-          </a:xfrm>
-          <a:prstGeom prst="rect">
-            <a:avLst/>
-          </a:prstGeom>
-          <a:noFill/>
-          <a:ln/>
-        </p:spPr>
-        <p:txBody>
-          <a:bodyPr wrap="square" lIns="91440" tIns="91440" rIns="91440" bIns="91440" rtlCol="0" anchor="t">
-            <a:spAutoFit/>
-          </a:bodyPr>
-          <a:lstStyle/>
-          <a:p>
-            <a:pPr indent="0" marL="0">
+            <a:pPr algn="ctr" indent="0" marL="0">
+              <a:lnSpc>
+                <a:spcPct val="120000"/>
+              </a:lnSpc>
+              <a:spcBef>
+                <a:spcPts val="360"/>
+              </a:spcBef>
+              <a:buNone/>
+            </a:pPr>
+            <a:r>
+              <a:rPr lang="en-US" sz="1152" dirty="0">
+                <a:solidFill>
+                  <a:srgbClr val="475569"/>
+                </a:solidFill>
+                <a:latin typeface="Microsoft YaHei" pitchFamily="34" charset="0"/>
+                <a:ea typeface="Microsoft YaHei" pitchFamily="34" charset="-122"/>
+                <a:cs typeface="Microsoft YaHei" pitchFamily="34" charset="-120"/>
+              </a:rPr>
+              <a:t>💡 </a:t>
+            </a:r>
+            <a:pPr algn="ctr" indent="0" marL="0">
               <a:lnSpc>
                 <a:spcPct val="120000"/>
               </a:lnSpc>
@@ -4183,15 +4097,15 @@
             <a:r>
               <a:rPr lang="en-US" sz="1152" b="1" dirty="0">
                 <a:solidFill>
-                  <a:srgbClr val="3B82F6"/>
-                </a:solidFill>
-                <a:latin typeface="Microsoft YaHei" pitchFamily="34" charset="0"/>
-                <a:ea typeface="Microsoft YaHei" pitchFamily="34" charset="-122"/>
-                <a:cs typeface="Microsoft YaHei" pitchFamily="34" charset="-120"/>
-              </a:rPr>
-              <a:t>工程思考：</a:t>
-            </a:r>
-            <a:pPr indent="0" marL="0">
+                  <a:srgbClr val="475569"/>
+                </a:solidFill>
+                <a:latin typeface="Microsoft YaHei" pitchFamily="34" charset="0"/>
+                <a:ea typeface="Microsoft YaHei" pitchFamily="34" charset="-122"/>
+                <a:cs typeface="Microsoft YaHei" pitchFamily="34" charset="-120"/>
+              </a:rPr>
+              <a:t>架构师的终极思考：</a:t>
+            </a:r>
+            <a:pPr algn="ctr" indent="0" marL="0">
               <a:lnSpc>
                 <a:spcPct val="120000"/>
               </a:lnSpc>
@@ -4209,7 +4123,7 @@
                 <a:ea typeface="Microsoft YaHei" pitchFamily="34" charset="-122"/>
                 <a:cs typeface="Microsoft YaHei" pitchFamily="34" charset="-120"/>
               </a:rPr>
-              <a:t>在你的系统设计中，有哪些模块可以去除“中心协调器”，改用环境媒介实现自组织协同？</a:t>
+              <a:t> 你的系统里，有哪些“中心协调器”可以换成“环境媒介”？</a:t>
             </a:r>
             <a:endParaRPr lang="en-US" sz="1152" dirty="0"/>
           </a:p>
